--- a/papers/kisssorcar/KISS_Sorcar_Lecture.pptx
+++ b/papers/kisssorcar/KISS_Sorcar_Lecture.pptx
@@ -8793,7 +8793,7 @@
               </a:defRPr>
             </a:pPr>
             <a:r>
-              <a:t>Prior tasks &amp; results prepended as numbered context entries.</a:t>
+              <a:t>Prior tasks &amp; results persisted to sorcar.db, prepended as numbered context entries.</a:t>
             </a:r>
           </a:p>
         </p:txBody>
@@ -8847,7 +8847,7 @@
               </a:defRPr>
             </a:pPr>
             <a:r>
-              <a:t>Session Management</a:t>
+              <a:t>Bounded Chat Context</a:t>
             </a:r>
           </a:p>
         </p:txBody>
@@ -8885,7 +8885,7 @@
               </a:defRPr>
             </a:pPr>
             <a:r>
-              <a:t>Three operations: new chat, resume by description, resume by ID.</a:t>
+              <a:t>Caps in-context history at MAX_TASKS = 10 to keep the prompt bounded.</a:t>
             </a:r>
           </a:p>
           <a:p>
@@ -8900,7 +8900,7 @@
               </a:defRPr>
             </a:pPr>
             <a:r>
-              <a:t>Automatic continuity in IDE, manual selection in CLI.</a:t>
+              <a:t>Preserves the first two entries (session intent) and the most recent ones; drops the middle.</a:t>
             </a:r>
           </a:p>
         </p:txBody>
@@ -8954,7 +8954,7 @@
               </a:defRPr>
             </a:pPr>
             <a:r>
-              <a:t>Metadata Persistence</a:t>
+              <a:t>Session Management, Frequent Tasks &amp; Metadata</a:t>
             </a:r>
           </a:p>
         </p:txBody>
@@ -8992,7 +8992,7 @@
               </a:defRPr>
             </a:pPr>
             <a:r>
-              <a:t>Records model, working directory, version, tokens, cost.</a:t>
+              <a:t>New chat / resume by description / resume by chat ID.</a:t>
             </a:r>
           </a:p>
           <a:p>
@@ -9007,7 +9007,12 @@
               </a:defRPr>
             </a:pPr>
             <a:r>
-              <a:t>Audit trail supports cost analysis and debugging.</a:t>
+              <a:t>Frequency table surfaces top tasks in IDE sidebar — click-to-replay recurring requests.</a:t>
+            </a:r>
+          </a:p>
+          <a:p>
+            <a:r>
+              <a:t>Records model, working dir, version, tokens, cost, parallel/worktree flags for audit.</a:t>
             </a:r>
           </a:p>
         </p:txBody>
@@ -11030,7 +11035,7 @@
               </a:defRPr>
             </a:pPr>
             <a:r>
-              <a:t>Web Research &amp; File Browsing Protocols</a:t>
+              <a:t>Web Research Protocol</a:t>
             </a:r>
           </a:p>
         </p:txBody>
@@ -11043,8 +11048,8 @@
         </p:nvSpPr>
         <p:spPr>
           <a:xfrm>
-            <a:off x="731520" y="5029200"/>
-            <a:ext cx="10728655" cy="731520"/>
+            <a:off x="731520" y="5577840"/>
+            <a:ext cx="10728655" cy="594360"/>
           </a:xfrm>
           <a:prstGeom prst="roundRect">
             <a:avLst>
@@ -11089,6 +11094,243 @@
             <a:br/>
             <a:r>
               <a:t>The prompt is the result of months of iterative refinement through self-hosted development.</a:t>
+            </a:r>
+          </a:p>
+        </p:txBody>
+      </p:sp>
+      <p:sp>
+        <p:nvSpPr>
+          <p:cNvPr id="24" name="Chevron 23"/>
+          <p:cNvSpPr/>
+          <p:nvPr/>
+        </p:nvSpPr>
+        <p:spPr>
+          <a:xfrm>
+            <a:off x="6217920" y="4187952"/>
+            <a:ext cx="320040" cy="274320"/>
+          </a:xfrm>
+          <a:prstGeom prst="chevron">
+            <a:avLst/>
+          </a:prstGeom>
+          <a:solidFill>
+            <a:srgbClr val="3B82F6"/>
+          </a:solidFill>
+          <a:ln>
+            <a:noFill/>
+          </a:ln>
+        </p:spPr>
+        <p:style>
+          <a:lnRef idx="1">
+            <a:schemeClr val="accent1"/>
+          </a:lnRef>
+          <a:fillRef idx="3">
+            <a:schemeClr val="accent1"/>
+          </a:fillRef>
+          <a:effectRef idx="2">
+            <a:schemeClr val="accent1"/>
+          </a:effectRef>
+          <a:fontRef idx="minor">
+            <a:schemeClr val="lt1"/>
+          </a:fontRef>
+        </p:style>
+        <p:txBody>
+          <a:bodyPr rtlCol="0" anchor="ctr"/>
+          <a:lstStyle/>
+          <a:p>
+            <a:pPr algn="ctr"/>
+            <a:endParaRPr/>
+          </a:p>
+        </p:txBody>
+      </p:sp>
+      <p:sp>
+        <p:nvSpPr>
+          <p:cNvPr id="25" name="TextBox 24"/>
+          <p:cNvSpPr txBox="1"/>
+          <p:nvPr/>
+        </p:nvSpPr>
+        <p:spPr>
+          <a:xfrm>
+            <a:off x="6766560" y="4160520"/>
+            <a:ext cx="4572000" cy="365760"/>
+          </a:xfrm>
+          <a:prstGeom prst="rect">
+            <a:avLst/>
+          </a:prstGeom>
+          <a:noFill/>
+        </p:spPr>
+        <p:txBody>
+          <a:bodyPr wrap="none">
+            <a:spAutoFit/>
+          </a:bodyPr>
+          <a:lstStyle/>
+          <a:p>
+            <a:pPr>
+              <a:defRPr sz="1800">
+                <a:solidFill>
+                  <a:srgbClr val="374151"/>
+                </a:solidFill>
+              </a:defRPr>
+            </a:pPr>
+            <a:r>
+              <a:t>File Browsing Protocol</a:t>
+            </a:r>
+          </a:p>
+        </p:txBody>
+      </p:sp>
+      <p:sp>
+        <p:nvSpPr>
+          <p:cNvPr id="24" name="Chevron 23"/>
+          <p:cNvSpPr/>
+          <p:nvPr/>
+        </p:nvSpPr>
+        <p:spPr>
+          <a:xfrm>
+            <a:off x="6217920" y="4617720"/>
+            <a:ext cx="320040" cy="274320"/>
+          </a:xfrm>
+          <a:prstGeom prst="chevron">
+            <a:avLst/>
+          </a:prstGeom>
+          <a:solidFill>
+            <a:srgbClr val="3B82F6"/>
+          </a:solidFill>
+          <a:ln>
+            <a:noFill/>
+          </a:ln>
+        </p:spPr>
+        <p:style>
+          <a:lnRef idx="1">
+            <a:schemeClr val="accent1"/>
+          </a:lnRef>
+          <a:fillRef idx="3">
+            <a:schemeClr val="accent1"/>
+          </a:fillRef>
+          <a:effectRef idx="2">
+            <a:schemeClr val="accent1"/>
+          </a:effectRef>
+          <a:fontRef idx="minor">
+            <a:schemeClr val="lt1"/>
+          </a:fontRef>
+        </p:style>
+        <p:txBody>
+          <a:bodyPr rtlCol="0" anchor="ctr"/>
+          <a:lstStyle/>
+          <a:p>
+            <a:pPr algn="ctr"/>
+            <a:endParaRPr/>
+          </a:p>
+        </p:txBody>
+      </p:sp>
+      <p:sp>
+        <p:nvSpPr>
+          <p:cNvPr id="25" name="TextBox 24"/>
+          <p:cNvSpPr txBox="1"/>
+          <p:nvPr/>
+        </p:nvSpPr>
+        <p:spPr>
+          <a:xfrm>
+            <a:off x="6766560" y="4590288"/>
+            <a:ext cx="4572000" cy="365760"/>
+          </a:xfrm>
+          <a:prstGeom prst="rect">
+            <a:avLst/>
+          </a:prstGeom>
+          <a:noFill/>
+        </p:spPr>
+        <p:txBody>
+          <a:bodyPr wrap="none">
+            <a:spAutoFit/>
+          </a:bodyPr>
+          <a:lstStyle/>
+          <a:p>
+            <a:pPr>
+              <a:defRPr sz="1800">
+                <a:solidFill>
+                  <a:srgbClr val="374151"/>
+                </a:solidFill>
+              </a:defRPr>
+            </a:pPr>
+            <a:r>
+              <a:t>Desktop Application Control</a:t>
+            </a:r>
+          </a:p>
+        </p:txBody>
+      </p:sp>
+      <p:sp>
+        <p:nvSpPr>
+          <p:cNvPr id="24" name="Chevron 23"/>
+          <p:cNvSpPr/>
+          <p:nvPr/>
+        </p:nvSpPr>
+        <p:spPr>
+          <a:xfrm>
+            <a:off x="6217920" y="5047488"/>
+            <a:ext cx="320040" cy="274320"/>
+          </a:xfrm>
+          <a:prstGeom prst="chevron">
+            <a:avLst/>
+          </a:prstGeom>
+          <a:solidFill>
+            <a:srgbClr val="3B82F6"/>
+          </a:solidFill>
+          <a:ln>
+            <a:noFill/>
+          </a:ln>
+        </p:spPr>
+        <p:style>
+          <a:lnRef idx="1">
+            <a:schemeClr val="accent1"/>
+          </a:lnRef>
+          <a:fillRef idx="3">
+            <a:schemeClr val="accent1"/>
+          </a:fillRef>
+          <a:effectRef idx="2">
+            <a:schemeClr val="accent1"/>
+          </a:effectRef>
+          <a:fontRef idx="minor">
+            <a:schemeClr val="lt1"/>
+          </a:fontRef>
+        </p:style>
+        <p:txBody>
+          <a:bodyPr rtlCol="0" anchor="ctr"/>
+          <a:lstStyle/>
+          <a:p>
+            <a:pPr algn="ctr"/>
+            <a:endParaRPr/>
+          </a:p>
+        </p:txBody>
+      </p:sp>
+      <p:sp>
+        <p:nvSpPr>
+          <p:cNvPr id="25" name="TextBox 24"/>
+          <p:cNvSpPr txBox="1"/>
+          <p:nvPr/>
+        </p:nvSpPr>
+        <p:spPr>
+          <a:xfrm>
+            <a:off x="6766560" y="5020056"/>
+            <a:ext cx="4572000" cy="365760"/>
+          </a:xfrm>
+          <a:prstGeom prst="rect">
+            <a:avLst/>
+          </a:prstGeom>
+          <a:noFill/>
+        </p:spPr>
+        <p:txBody>
+          <a:bodyPr wrap="none">
+            <a:spAutoFit/>
+          </a:bodyPr>
+          <a:lstStyle/>
+          <a:p>
+            <a:pPr>
+              <a:defRPr sz="1800">
+                <a:solidFill>
+                  <a:srgbClr val="374151"/>
+                </a:solidFill>
+              </a:defRPr>
+            </a:pPr>
+            <a:r>
+              <a:t>Sorcar-Specific Overrides</a:t>
             </a:r>
           </a:p>
         </p:txBody>
@@ -25711,19 +25953,19 @@
         </p:nvSpPr>
         <p:spPr>
           <a:xfrm>
-            <a:off x="731520" y="1554480"/>
-            <a:ext cx="10728655" cy="868680"/>
+            <a:off x="731520" y="1417320"/>
+            <a:ext cx="10725912" cy="777240"/>
           </a:xfrm>
           <a:prstGeom prst="roundRect">
-            <a:avLst>
-              <a:gd name="adj" fmla="val 5000"/>
-            </a:avLst>
+            <a:avLst/>
           </a:prstGeom>
           <a:solidFill>
-            <a:srgbClr val="DBEAFE"/>
+            <a:srgbClr val="F2F6FC"/>
           </a:solidFill>
-          <a:ln>
-            <a:noFill/>
+          <a:ln w="12700">
+            <a:solidFill>
+              <a:srgbClr val="1F4E79"/>
+            </a:solidFill>
           </a:ln>
         </p:spPr>
         <p:style>
@@ -25741,48 +25983,28 @@
           </a:fontRef>
         </p:style>
         <p:txBody>
-          <a:bodyPr wrap="square" lIns="228600" tIns="91440" bIns="91440" rtlCol="0" anchor="ctr"/>
-          <a:lstStyle/>
-          <a:p>
-            <a:pPr algn="ctr">
-              <a:defRPr sz="1600" b="1">
-                <a:solidFill>
-                  <a:srgbClr val="1B2A4A"/>
-                </a:solidFill>
-              </a:defRPr>
-            </a:pPr>
-            <a:r>
+          <a:bodyPr rtlCol="0" anchor="ctr" wrap="square" lIns="164592" rIns="164592" tIns="54864" bIns="54864"/>
+          <a:lstStyle/>
+          <a:p>
+            <a:pPr algn="l"/>
+            <a:r>
+              <a:rPr b="1" sz="1800">
+                <a:solidFill>
+                  <a:srgbClr val="1F4E79"/>
+                </a:solidFill>
+              </a:rPr>
               <a:t>Code-Specialized Models</a:t>
             </a:r>
           </a:p>
           <a:p>
-            <a:pPr>
-              <a:lnSpc>
-                <a:spcPts val="1800"/>
-              </a:lnSpc>
-              <a:defRPr sz="1300">
-                <a:solidFill>
-                  <a:srgbClr val="374151"/>
-                </a:solidFill>
-              </a:defRPr>
-            </a:pPr>
-            <a:r>
-              <a:t>Code Llama, StarCoder, DeepSeek-Coder,</a:t>
-            </a:r>
-          </a:p>
-          <a:p>
-            <a:pPr>
-              <a:lnSpc>
-                <a:spcPts val="1800"/>
-              </a:lnSpc>
-              <a:defRPr sz="1300">
-                <a:solidFill>
-                  <a:srgbClr val="374151"/>
-                </a:solidFill>
-              </a:defRPr>
-            </a:pPr>
-            <a:r>
-              <a:t>Claude Opus 4.6, Cursor Composer 2, Kimi K2.5, GLM-5.1</a:t>
+            <a:pPr algn="l"/>
+            <a:r>
+              <a:rPr sz="1300">
+                <a:solidFill>
+                  <a:srgbClr val="333333"/>
+                </a:solidFill>
+              </a:rPr>
+              <a:t>Code Llama, StarCoder, DeepSeek-Coder, Claude Opus 4.6/4.7, GPT-5.5, Gemini 3.1, Cursor Composer 2, Kimi K2.5, GLM-5.1</a:t>
             </a:r>
           </a:p>
         </p:txBody>
@@ -25795,19 +26017,19 @@
         </p:nvSpPr>
         <p:spPr>
           <a:xfrm>
-            <a:off x="731520" y="2514600"/>
-            <a:ext cx="10728655" cy="868680"/>
+            <a:off x="731520" y="2249424"/>
+            <a:ext cx="10725912" cy="777240"/>
           </a:xfrm>
           <a:prstGeom prst="roundRect">
-            <a:avLst>
-              <a:gd name="adj" fmla="val 5000"/>
-            </a:avLst>
+            <a:avLst/>
           </a:prstGeom>
           <a:solidFill>
-            <a:srgbClr val="DCFBEA"/>
+            <a:srgbClr val="F2F6FC"/>
           </a:solidFill>
-          <a:ln>
-            <a:noFill/>
+          <a:ln w="12700">
+            <a:solidFill>
+              <a:srgbClr val="1F4E79"/>
+            </a:solidFill>
           </a:ln>
         </p:spPr>
         <p:style>
@@ -25825,48 +26047,28 @@
           </a:fontRef>
         </p:style>
         <p:txBody>
-          <a:bodyPr wrap="square" lIns="228600" tIns="91440" bIns="91440" rtlCol="0" anchor="ctr"/>
-          <a:lstStyle/>
-          <a:p>
-            <a:pPr algn="ctr">
-              <a:defRPr sz="1600" b="1">
-                <a:solidFill>
-                  <a:srgbClr val="065941"/>
-                </a:solidFill>
-              </a:defRPr>
-            </a:pPr>
-            <a:r>
+          <a:bodyPr rtlCol="0" anchor="ctr" wrap="square" lIns="164592" rIns="164592" tIns="54864" bIns="54864"/>
+          <a:lstStyle/>
+          <a:p>
+            <a:pPr algn="l"/>
+            <a:r>
+              <a:rPr b="1" sz="1800">
+                <a:solidFill>
+                  <a:srgbClr val="1F4E79"/>
+                </a:solidFill>
+              </a:rPr>
               <a:t>Code Generation Agents</a:t>
             </a:r>
           </a:p>
           <a:p>
-            <a:pPr>
-              <a:lnSpc>
-                <a:spcPts val="1800"/>
-              </a:lnSpc>
-              <a:defRPr sz="1300">
-                <a:solidFill>
-                  <a:srgbClr val="374151"/>
-                </a:solidFill>
-              </a:defRPr>
-            </a:pPr>
-            <a:r>
-              <a:t>SWE-Agent, OpenHands, Agentless, Devin, Aider</a:t>
-            </a:r>
-          </a:p>
-          <a:p>
-            <a:pPr>
-              <a:lnSpc>
-                <a:spcPts val="1800"/>
-              </a:lnSpc>
-              <a:defRPr sz="1300">
-                <a:solidFill>
-                  <a:srgbClr val="374151"/>
-                </a:solidFill>
-              </a:defRPr>
-            </a:pPr>
-            <a:r>
-              <a:t>KISS addresses single-session limitation + stronger safety</a:t>
+            <a:pPr algn="l"/>
+            <a:r>
+              <a:rPr sz="1300">
+                <a:solidFill>
+                  <a:srgbClr val="333333"/>
+                </a:solidFill>
+              </a:rPr>
+              <a:t>SWE-Agent, OpenHands, Agentless, Devin, Aider, Claude Code, Codex   — KISS adds Relentless continuation + worktree safety</a:t>
             </a:r>
           </a:p>
         </p:txBody>
@@ -25879,19 +26081,19 @@
         </p:nvSpPr>
         <p:spPr>
           <a:xfrm>
-            <a:off x="731520" y="3474720"/>
-            <a:ext cx="10728655" cy="868680"/>
+            <a:off x="731520" y="3081528"/>
+            <a:ext cx="10725912" cy="777240"/>
           </a:xfrm>
           <a:prstGeom prst="roundRect">
-            <a:avLst>
-              <a:gd name="adj" fmla="val 5000"/>
-            </a:avLst>
+            <a:avLst/>
           </a:prstGeom>
           <a:solidFill>
-            <a:srgbClr val="FEF3C7"/>
+            <a:srgbClr val="F2F6FC"/>
           </a:solidFill>
-          <a:ln>
-            <a:noFill/>
+          <a:ln w="12700">
+            <a:solidFill>
+              <a:srgbClr val="1F4E79"/>
+            </a:solidFill>
           </a:ln>
         </p:spPr>
         <p:style>
@@ -25909,48 +26111,28 @@
           </a:fontRef>
         </p:style>
         <p:txBody>
-          <a:bodyPr wrap="square" lIns="228600" tIns="91440" bIns="91440" rtlCol="0" anchor="ctr"/>
-          <a:lstStyle/>
-          <a:p>
-            <a:pPr algn="ctr">
-              <a:defRPr sz="1600" b="1">
-                <a:solidFill>
-                  <a:srgbClr val="92400E"/>
-                </a:solidFill>
-              </a:defRPr>
-            </a:pPr>
-            <a:r>
-              <a:t>Multi-Agent Systems</a:t>
-            </a:r>
-          </a:p>
-          <a:p>
-            <a:pPr>
-              <a:lnSpc>
-                <a:spcPts val="1800"/>
-              </a:lnSpc>
-              <a:defRPr sz="1300">
-                <a:solidFill>
-                  <a:srgbClr val="374151"/>
-                </a:solidFill>
-              </a:defRPr>
-            </a:pPr>
-            <a:r>
-              <a:t>ChatDev, MetaGPT, AutoGen</a:t>
-            </a:r>
-          </a:p>
-          <a:p>
-            <a:pPr>
-              <a:lnSpc>
-                <a:spcPts val="1800"/>
-              </a:lnSpc>
-              <a:defRPr sz="1300">
-                <a:solidFill>
-                  <a:srgbClr val="374151"/>
-                </a:solidFill>
-              </a:defRPr>
-            </a:pPr>
-            <a:r>
-              <a:t>KISS: single agent with broad tools vs. role-playing specialists</a:t>
+          <a:bodyPr rtlCol="0" anchor="ctr" wrap="square" lIns="164592" rIns="164592" tIns="54864" bIns="54864"/>
+          <a:lstStyle/>
+          <a:p>
+            <a:pPr algn="l"/>
+            <a:r>
+              <a:rPr b="1" sz="1800">
+                <a:solidFill>
+                  <a:srgbClr val="1F4E79"/>
+                </a:solidFill>
+              </a:rPr>
+              <a:t>Multi-Agent &amp; Reasoning</a:t>
+            </a:r>
+          </a:p>
+          <a:p>
+            <a:pPr algn="l"/>
+            <a:r>
+              <a:rPr sz="1300">
+                <a:solidFill>
+                  <a:srgbClr val="333333"/>
+                </a:solidFill>
+              </a:rPr>
+              <a:t>ChatDev, MetaGPT, AutoGen; ReAct, Toolformer, CoT, Tree of Thoughts, Reflexion</a:t>
             </a:r>
           </a:p>
         </p:txBody>
@@ -25963,19 +26145,19 @@
         </p:nvSpPr>
         <p:spPr>
           <a:xfrm>
-            <a:off x="731520" y="4434840"/>
-            <a:ext cx="10728655" cy="868680"/>
+            <a:off x="731520" y="3913632"/>
+            <a:ext cx="10725912" cy="777240"/>
           </a:xfrm>
           <a:prstGeom prst="roundRect">
-            <a:avLst>
-              <a:gd name="adj" fmla="val 5000"/>
-            </a:avLst>
+            <a:avLst/>
           </a:prstGeom>
           <a:solidFill>
-            <a:srgbClr val="F3E8FF"/>
+            <a:srgbClr val="F2F6FC"/>
           </a:solidFill>
-          <a:ln>
-            <a:noFill/>
+          <a:ln w="12700">
+            <a:solidFill>
+              <a:srgbClr val="1F4E79"/>
+            </a:solidFill>
           </a:ln>
         </p:spPr>
         <p:style>
@@ -25993,48 +26175,28 @@
           </a:fontRef>
         </p:style>
         <p:txBody>
-          <a:bodyPr wrap="square" lIns="228600" tIns="91440" bIns="91440" rtlCol="0" anchor="ctr"/>
-          <a:lstStyle/>
-          <a:p>
-            <a:pPr algn="ctr">
-              <a:defRPr sz="1600" b="1">
-                <a:solidFill>
-                  <a:srgbClr val="6B21A8"/>
-                </a:solidFill>
-              </a:defRPr>
-            </a:pPr>
-            <a:r>
-              <a:t>ReAct &amp; Reasoning</a:t>
-            </a:r>
-          </a:p>
-          <a:p>
-            <a:pPr>
-              <a:lnSpc>
-                <a:spcPts val="1800"/>
-              </a:lnSpc>
-              <a:defRPr sz="1300">
-                <a:solidFill>
-                  <a:srgbClr val="374151"/>
-                </a:solidFill>
-              </a:defRPr>
-            </a:pPr>
-            <a:r>
-              <a:t>ReAct, Toolformer, CoT, Tree of Thoughts, Reflexion</a:t>
-            </a:r>
-          </a:p>
-          <a:p>
-            <a:pPr>
-              <a:lnSpc>
-                <a:spcPts val="1800"/>
-              </a:lnSpc>
-              <a:defRPr sz="1300">
-                <a:solidFill>
-                  <a:srgbClr val="374151"/>
-                </a:solidFill>
-              </a:defRPr>
-            </a:pPr>
-            <a:r>
-              <a:t>KISS: native function calling + continuation summaries</a:t>
+          <a:bodyPr rtlCol="0" anchor="ctr" wrap="square" lIns="164592" rIns="164592" tIns="54864" bIns="54864"/>
+          <a:lstStyle/>
+          <a:p>
+            <a:pPr algn="l"/>
+            <a:r>
+              <a:rPr b="1" sz="1800">
+                <a:solidFill>
+                  <a:srgbClr val="1F4E79"/>
+                </a:solidFill>
+              </a:rPr>
+              <a:t>Agent Frameworks &amp; Surveys</a:t>
+            </a:r>
+          </a:p>
+          <a:p>
+            <a:pPr algn="l"/>
+            <a:r>
+              <a:rPr sz="1300">
+                <a:solidFill>
+                  <a:srgbClr val="333333"/>
+                </a:solidFill>
+              </a:rPr>
+              <a:t>LangChain, DSPy, CrewAI, smolagents, OpenAI Agents SDK, Google ADK; Surveys by Xi 2023, Wang 2024</a:t>
             </a:r>
           </a:p>
         </p:txBody>
@@ -26047,19 +26209,19 @@
         </p:nvSpPr>
         <p:spPr>
           <a:xfrm>
-            <a:off x="731520" y="5394960"/>
-            <a:ext cx="10728655" cy="868680"/>
+            <a:off x="731520" y="4745736"/>
+            <a:ext cx="10725912" cy="777240"/>
           </a:xfrm>
           <a:prstGeom prst="roundRect">
-            <a:avLst>
-              <a:gd name="adj" fmla="val 5000"/>
-            </a:avLst>
+            <a:avLst/>
           </a:prstGeom>
           <a:solidFill>
-            <a:srgbClr val="FFE4E6"/>
+            <a:srgbClr val="F2F6FC"/>
           </a:solidFill>
-          <a:ln>
-            <a:noFill/>
+          <a:ln w="12700">
+            <a:solidFill>
+              <a:srgbClr val="1F4E79"/>
+            </a:solidFill>
           </a:ln>
         </p:spPr>
         <p:style>
@@ -26077,48 +26239,92 @@
           </a:fontRef>
         </p:style>
         <p:txBody>
-          <a:bodyPr wrap="square" lIns="228600" tIns="91440" bIns="91440" rtlCol="0" anchor="ctr"/>
-          <a:lstStyle/>
-          <a:p>
-            <a:pPr algn="ctr">
-              <a:defRPr sz="1600" b="1">
-                <a:solidFill>
-                  <a:srgbClr val="9F1239"/>
-                </a:solidFill>
-              </a:defRPr>
-            </a:pPr>
-            <a:r>
+          <a:bodyPr rtlCol="0" anchor="ctr" wrap="square" lIns="164592" rIns="164592" tIns="54864" bIns="54864"/>
+          <a:lstStyle/>
+          <a:p>
+            <a:pPr algn="l"/>
+            <a:r>
+              <a:rPr b="1" sz="1800">
+                <a:solidFill>
+                  <a:srgbClr val="1F4E79"/>
+                </a:solidFill>
+              </a:rPr>
+              <a:t>Recent Agentic SE &amp; Benchmarks</a:t>
+            </a:r>
+          </a:p>
+          <a:p>
+            <a:pPr algn="l"/>
+            <a:r>
+              <a:rPr sz="1300">
+                <a:solidFill>
+                  <a:srgbClr val="333333"/>
+                </a:solidFill>
+              </a:rPr>
+              <a:t>SE 3.0 (Hassan), Wang 2025 survey, Trae test-time scaling, SWE-bench Pro, LiveCodeBench; cheating audits (Stein, Wang); GSD</a:t>
+            </a:r>
+          </a:p>
+        </p:txBody>
+      </p:sp>
+      <p:sp>
+        <p:nvSpPr>
+          <p:cNvPr id="11" name="Rounded Rectangle 10"/>
+          <p:cNvSpPr/>
+          <p:nvPr/>
+        </p:nvSpPr>
+        <p:spPr>
+          <a:xfrm>
+            <a:off x="731520" y="5577840"/>
+            <a:ext cx="10725912" cy="777240"/>
+          </a:xfrm>
+          <a:prstGeom prst="roundRect">
+            <a:avLst/>
+          </a:prstGeom>
+          <a:solidFill>
+            <a:srgbClr val="F2F6FC"/>
+          </a:solidFill>
+          <a:ln w="12700">
+            <a:solidFill>
+              <a:srgbClr val="1F4E79"/>
+            </a:solidFill>
+          </a:ln>
+        </p:spPr>
+        <p:style>
+          <a:lnRef idx="1">
+            <a:schemeClr val="accent1"/>
+          </a:lnRef>
+          <a:fillRef idx="3">
+            <a:schemeClr val="accent1"/>
+          </a:fillRef>
+          <a:effectRef idx="2">
+            <a:schemeClr val="accent1"/>
+          </a:effectRef>
+          <a:fontRef idx="minor">
+            <a:schemeClr val="lt1"/>
+          </a:fontRef>
+        </p:style>
+        <p:txBody>
+          <a:bodyPr rtlCol="0" anchor="ctr" wrap="square" lIns="164592" rIns="164592" tIns="54864" bIns="54864"/>
+          <a:lstStyle/>
+          <a:p>
+            <a:pPr algn="l"/>
+            <a:r>
+              <a:rPr b="1" sz="1800">
+                <a:solidFill>
+                  <a:srgbClr val="1F4E79"/>
+                </a:solidFill>
+              </a:rPr>
               <a:t>IDE Integration</a:t>
             </a:r>
           </a:p>
           <a:p>
-            <a:pPr>
-              <a:lnSpc>
-                <a:spcPts val="1800"/>
-              </a:lnSpc>
-              <a:defRPr sz="1300">
-                <a:solidFill>
-                  <a:srgbClr val="374151"/>
-                </a:solidFill>
-              </a:defRPr>
-            </a:pPr>
-            <a:r>
-              <a:t>GitHub Copilot, Cursor, Windsurf</a:t>
-            </a:r>
-          </a:p>
-          <a:p>
-            <a:pPr>
-              <a:lnSpc>
-                <a:spcPts val="1800"/>
-              </a:lnSpc>
-              <a:defRPr sz="1300">
-                <a:solidFill>
-                  <a:srgbClr val="374151"/>
-                </a:solidFill>
-              </a:defRPr>
-            </a:pPr>
-            <a:r>
-              <a:t>They do completion/single-turn; KISS does autonomous multi-step</a:t>
+            <a:pPr algn="l"/>
+            <a:r>
+              <a:rPr sz="1300">
+                <a:solidFill>
+                  <a:srgbClr val="333333"/>
+                </a:solidFill>
+              </a:rPr>
+              <a:t>GitHub Copilot, Cursor, Windsurf — completion / single-turn; KISS: autonomous multi-step with full tool access + git isolation</a:t>
             </a:r>
           </a:p>
         </p:txBody>
